--- a/plano-de-aulas/aula-05-slides.pptx
+++ b/plano-de-aulas/aula-05-slides.pptx
@@ -3491,7 +3491,7 @@
           <a:lstStyle/>
           <a:p>
             <a:r>
-              <a:t>Filas com RabbitMQ + DLQ</a:t>
+              <a:t>Comunicação assíncrona</a:t>
             </a:r>
           </a:p>
         </p:txBody>
@@ -3512,7 +3512,7 @@
           <a:lstStyle/>
           <a:p>
             <a:r>
-              <a:t>BE-JV-010 · Aula 5 · 01/07 · Filas</a:t>
+              <a:t>BE-JV-010 · Aula 4 · 29/06 · Producer/consumer</a:t>
             </a:r>
           </a:p>
         </p:txBody>
@@ -3572,17 +3572,17 @@
           <a:lstStyle/>
           <a:p>
             <a:r>
-              <a:t>A gravação falha de forma intermitente (banco oscila)</a:t>
+              <a:t>A gravação é lenta e às vezes o banco está fora.</a:t>
             </a:r>
           </a:p>
           <a:p>
             <a:r>
-              <a:t>e às vezes permanente (mensagem malformada).</a:t>
+              <a:t>O cliente não pode esperar nem perder o comprovante.</a:t>
             </a:r>
           </a:p>
           <a:p>
             <a:r>
-              <a:t>Os dois casos não podem ser tratados igual.</a:t>
+              <a:t>Como aceitar agora e processar depois?</a:t>
             </a:r>
           </a:p>
         </p:txBody>
@@ -3659,22 +3659,22 @@
           <a:lstStyle/>
           <a:p>
             <a:r>
-              <a:t>Exchange, binding, routing key, queue</a:t>
+              <a:t>Mensagem × evento</a:t>
             </a:r>
           </a:p>
           <a:p>
             <a:r>
-              <a:t>Tipos de exchange</a:t>
+              <a:t>at-most/at-least/exactly-once (e por que exactly-once é mito)</a:t>
             </a:r>
           </a:p>
           <a:p>
             <a:r>
-              <a:t>Retry × Dead Letter Queue</a:t>
+              <a:t>Acoplamento temporal</a:t>
             </a:r>
           </a:p>
           <a:p>
             <a:r>
-              <a:t>Ack/nack e redelivery no crash</a:t>
+              <a:t>Idempotência do consumidor</a:t>
             </a:r>
           </a:p>
         </p:txBody>
@@ -3751,12 +3751,12 @@
           <a:lstStyle/>
           <a:p>
             <a:r>
-              <a:t>DLQ é a 'fila de exceção / arquivo de rejeitados' do batch</a:t>
+              <a:t>Quem usou IBM MQ / JMS / MQSeries já fez producer/consumer</a:t>
             </a:r>
           </a:p>
           <a:p>
             <a:r>
-              <a:t>agora explícita e observável</a:t>
+              <a:t>Muda o ferramental, não o conceito</a:t>
             </a:r>
           </a:p>
         </p:txBody>
@@ -3833,17 +3833,17 @@
           <a:lstStyle/>
           <a:p>
             <a:r>
-              <a:t>Work queue para jobs de IA respeitando rate limit</a:t>
+              <a:t>Desacoplar inferência cara do caminho síncrono</a:t>
             </a:r>
           </a:p>
           <a:p>
             <a:r>
-              <a:t>Backpressure quando o LLM é o gargalo</a:t>
+              <a:t>Filas de tarefas de agentes (workers)</a:t>
             </a:r>
           </a:p>
           <a:p>
             <a:r>
-              <a:t>DLQ para chamadas de IA que falham (sem perda silenciosa)</a:t>
+              <a:t>Human-in-the-loop assíncrono</a:t>
             </a:r>
           </a:p>
         </p:txBody>
@@ -3920,12 +3920,12 @@
           <a:lstStyle/>
           <a:p>
             <a:r>
-              <a:t>Base: configurar DLQ e provocar mensagem envenenada</a:t>
+              <a:t>Base: consumidor idempotente (reprocesso não duplica)</a:t>
             </a:r>
           </a:p>
           <a:p>
             <a:r>
-              <a:t>Stretch: retry com backoff + idempotência sob redelivery</a:t>
+              <a:t>Stretch: simular consumidor lento/caído; discutir backpressure</a:t>
             </a:r>
           </a:p>
         </p:txBody>
@@ -3981,7 +3981,7 @@
           <a:lstStyle/>
           <a:p>
             <a:r>
-              <a:t>Mensagem nunca some por acidente — ou foi processada, ou está numa DLQ por decisão.</a:t>
+              <a:t>Assíncrono não é 'mais rápido' — é 'não falhar junto'.</a:t>
             </a:r>
           </a:p>
         </p:txBody>
